--- a/docs/Housing-AgentCore-Customer.pptx
+++ b/docs/Housing-AgentCore-Customer.pptx
@@ -1127,7 +1127,7 @@
           <a:p>
             <a:r>
               <a:rPr lang="en-US" dirty="0"/>
-              <a:t>Reproducible and enforced. The income-vs-AMI engine is deterministic and transparent, so a housing specialist can defend each determination at an informal hearing.</a:t>
+              <a:t>Reproducible and enforced. Two clean-account validation runs are captured in the repo (evidence/): the full governed pipeline SUCCEEDED live on real services, and the Cedar authorization gateway reached CREATE_COMPLETE in ENFORCE as pure infrastructure-as-code. The income-vs-AMI engine is deterministic and transparent, so a housing specialist can defend each determination at an informal hearing.</a:t>
             </a:r>
             <a:endParaRPr lang="en-US" dirty="0"/>
           </a:p>
@@ -2424,7 +2424,7 @@
                 <a:ea typeface="Calibri" pitchFamily="34" charset="-122"/>
                 <a:cs typeface="Calibri" pitchFamily="34" charset="-120"/>
               </a:rPr>
-              <a:t>Walk your housing-program, privacy, and security teams through the architecture and the live 30-check proof.</a:t>
+              <a:t>Walk your housing-program, privacy, and security teams through the architecture and the captured validation evidence.</a:t>
             </a:r>
             <a:endParaRPr lang="en-US" sz="1230" dirty="0"/>
           </a:p>
@@ -8946,7 +8946,7 @@
                 <a:ea typeface="Cambria" pitchFamily="34" charset="-122"/>
                 <a:cs typeface="Cambria" pitchFamily="34" charset="-120"/>
               </a:rPr>
-              <a:t>30/30</a:t>
+              <a:t>117/117</a:t>
             </a:r>
             <a:endParaRPr lang="en-US" sz="3000" dirty="0"/>
           </a:p>
@@ -8988,7 +8988,7 @@
                 <a:ea typeface="Calibri" pitchFamily="34" charset="-122"/>
                 <a:cs typeface="Calibri" pitchFamily="34" charset="-120"/>
               </a:rPr>
-              <a:t>governance checks pass, live</a:t>
+              <a:t>automated tests green in CI</a:t>
             </a:r>
             <a:endParaRPr lang="en-US" sz="1150" dirty="0"/>
           </a:p>
@@ -9061,7 +9061,7 @@
                 <a:ea typeface="Cambria" pitchFamily="34" charset="-122"/>
                 <a:cs typeface="Cambria" pitchFamily="34" charset="-120"/>
               </a:rPr>
-              <a:t>AMI-based</a:t>
+              <a:t>End-to-end</a:t>
             </a:r>
             <a:endParaRPr lang="en-US" sz="3000" dirty="0"/>
           </a:p>
@@ -9103,7 +9103,7 @@
                 <a:ea typeface="Calibri" pitchFamily="34" charset="-122"/>
                 <a:cs typeface="Calibri" pitchFamily="34" charset="-120"/>
               </a:rPr>
-              <a:t>eligibility computed deterministically</a:t>
+              <a:t>governed pipeline proven live on AWS</a:t>
             </a:r>
             <a:endParaRPr lang="en-US" sz="1150" dirty="0"/>
           </a:p>
@@ -9291,7 +9291,7 @@
                 <a:ea typeface="Calibri" pitchFamily="34" charset="-122"/>
                 <a:cs typeface="Calibri" pitchFamily="34" charset="-120"/>
               </a:rPr>
-              <a:t>Demonstrated live, in enforcement mode:</a:t>
+              <a:t>Validated live in your deployment path (AWS CDK), enforcement on — evidence captured in the repo:</a:t>
             </a:r>
             <a:endParaRPr lang="en-US" sz="1350" dirty="0"/>
           </a:p>
@@ -9399,7 +9399,7 @@
                 <a:ea typeface="Calibri" pitchFamily="34" charset="-122"/>
                 <a:cs typeface="Calibri" pitchFamily="34" charset="-120"/>
               </a:rPr>
-              <a:t>A real, de-identified determination notice drafted by the model</a:t>
+              <a:t>The full governed workflow ran end-to-end live — intake to committed determination</a:t>
             </a:r>
             <a:endParaRPr lang="en-US" sz="1250" dirty="0"/>
           </a:p>
@@ -9507,7 +9507,7 @@
                 <a:ea typeface="Calibri" pitchFamily="34" charset="-122"/>
                 <a:cs typeface="Calibri" pitchFamily="34" charset="-120"/>
               </a:rPr>
-              <a:t>PII (name, SSN, address) removed before the model — fail-closed</a:t>
+              <a:t>PII removed before the model — fail-closed, and cryptographically proven downstream</a:t>
             </a:r>
             <a:endParaRPr lang="en-US" sz="1250" dirty="0"/>
           </a:p>
@@ -9615,7 +9615,7 @@
                 <a:ea typeface="Calibri" pitchFamily="34" charset="-122"/>
                 <a:cs typeface="Calibri" pitchFamily="34" charset="-120"/>
               </a:rPr>
-              <a:t>A live, authoritative HUD income-limit lookup, stamped with provenance</a:t>
+              <a:t>A live, authoritative HUD income-limit lookup with a verified provenance signature</a:t>
             </a:r>
             <a:endParaRPr lang="en-US" sz="1250" dirty="0"/>
           </a:p>
@@ -9831,7 +9831,7 @@
                 <a:ea typeface="Calibri" pitchFamily="34" charset="-122"/>
                 <a:cs typeface="Calibri" pitchFamily="34" charset="-120"/>
               </a:rPr>
-              <a:t>A different specialist required to approve; approvals are single-use</a:t>
+              <a:t>A different specialist approves; the approval is bound to the exact case content and finalizes exactly once</a:t>
             </a:r>
             <a:endParaRPr lang="en-US" sz="1250" dirty="0"/>
           </a:p>
@@ -9939,7 +9939,7 @@
                 <a:ea typeface="Calibri" pitchFamily="34" charset="-122"/>
                 <a:cs typeface="Calibri" pitchFamily="34" charset="-120"/>
               </a:rPr>
-              <a:t>Tamper-proof audit written for each step; duplicates rejected</a:t>
+              <a:t>Tamper-evident (hash-chained) audit of every step; the authorization gateway deploys as code, in ENFORCE</a:t>
             </a:r>
             <a:endParaRPr lang="en-US" sz="1250" dirty="0"/>
           </a:p>

--- a/docs/Housing-AgentCore-Customer.pptx
+++ b/docs/Housing-AgentCore-Customer.pptx
@@ -1127,7 +1127,7 @@
           <a:p>
             <a:r>
               <a:rPr lang="en-US" dirty="0"/>
-              <a:t>Reproducible and enforced. Two clean-account validation runs are captured in the repo (evidence/): the full governed pipeline SUCCEEDED live on real services, and the Cedar authorization gateway reached CREATE_COMPLETE in ENFORCE as pure infrastructure-as-code. The income-vs-AMI engine is deterministic and transparent, so a housing specialist can defend each determination at an informal hearing.</a:t>
+              <a:t>Reproducible and enforced. Three clean-account validation runs are captured in the repo (evidence/): the full governed pipeline live on real services; the Cedar authorization gateway as pure infrastructure-as-code in ENFORCE; and the complete hardening posture — private networking with a HUD-only egress allowlist, customer-managed KMS, MFA-required identity, concurrency and replay-storm proofs, and a passing PII telemetry canary. The income-vs-AMI engine is deterministic and transparent, so a housing specialist can defend each determination at an informal hearing.</a:t>
             </a:r>
             <a:endParaRPr lang="en-US" dirty="0"/>
           </a:p>
@@ -8946,7 +8946,7 @@
                 <a:ea typeface="Cambria" pitchFamily="34" charset="-122"/>
                 <a:cs typeface="Cambria" pitchFamily="34" charset="-120"/>
               </a:rPr>
-              <a:t>117/117</a:t>
+              <a:t>145/145</a:t>
             </a:r>
             <a:endParaRPr lang="en-US" sz="3000" dirty="0"/>
           </a:p>
@@ -9103,7 +9103,7 @@
                 <a:ea typeface="Calibri" pitchFamily="34" charset="-122"/>
                 <a:cs typeface="Calibri" pitchFamily="34" charset="-120"/>
               </a:rPr>
-              <a:t>governed pipeline proven live on AWS</a:t>
+              <a:t>proven live - including fully network-isolated</a:t>
             </a:r>
             <a:endParaRPr lang="en-US" sz="1150" dirty="0"/>
           </a:p>
@@ -9399,7 +9399,7 @@
                 <a:ea typeface="Calibri" pitchFamily="34" charset="-122"/>
                 <a:cs typeface="Calibri" pitchFamily="34" charset="-120"/>
               </a:rPr>
-              <a:t>The full governed workflow ran end-to-end live — intake to committed determination</a:t>
+              <a:t>The full governed workflow ran end-to-end live — in private subnets, behind an egress firewall that permits ONLY the HUD API</a:t>
             </a:r>
             <a:endParaRPr lang="en-US" sz="1250" dirty="0"/>
           </a:p>
@@ -9507,7 +9507,7 @@
                 <a:ea typeface="Calibri" pitchFamily="34" charset="-122"/>
                 <a:cs typeface="Calibri" pitchFamily="34" charset="-120"/>
               </a:rPr>
-              <a:t>PII removed before the model — fail-closed, and cryptographically proven downstream</a:t>
+              <a:t>PII removed before the model — fail-closed, cryptographically proven, and a telemetry canary confirmed zero PII in logs or traces</a:t>
             </a:r>
             <a:endParaRPr lang="en-US" sz="1250" dirty="0"/>
           </a:p>
@@ -9723,7 +9723,7 @@
                 <a:ea typeface="Calibri" pitchFamily="34" charset="-122"/>
                 <a:cs typeface="Calibri" pitchFamily="34" charset="-120"/>
               </a:rPr>
-              <a:t>The agent blocked from committing a determination — every time</a:t>
+              <a:t>Your keys everywhere: customer-managed KMS over every store, secret, log, and alert; MFA-required operator identity</a:t>
             </a:r>
             <a:endParaRPr lang="en-US" sz="1250" dirty="0"/>
           </a:p>
@@ -9831,7 +9831,7 @@
                 <a:ea typeface="Calibri" pitchFamily="34" charset="-122"/>
                 <a:cs typeface="Calibri" pitchFamily="34" charset="-120"/>
               </a:rPr>
-              <a:t>A different specialist approves; the approval is bound to the exact case content and finalizes exactly once</a:t>
+              <a:t>A different specialist approves; the approval is bound to the exact case content — a 10-way replay storm committed exactly once</a:t>
             </a:r>
             <a:endParaRPr lang="en-US" sz="1250" dirty="0"/>
           </a:p>

--- a/docs/Housing-AgentCore-Customer.pptx
+++ b/docs/Housing-AgentCore-Customer.pptx
@@ -8946,7 +8946,7 @@
                 <a:ea typeface="Cambria" pitchFamily="34" charset="-122"/>
                 <a:cs typeface="Cambria" pitchFamily="34" charset="-120"/>
               </a:rPr>
-              <a:t>145/145</a:t>
+              <a:t>181/181</a:t>
             </a:r>
             <a:endParaRPr lang="en-US" sz="3000" dirty="0"/>
           </a:p>

--- a/docs/Housing-AgentCore-Customer.pptx
+++ b/docs/Housing-AgentCore-Customer.pptx
@@ -8946,7 +8946,7 @@
                 <a:ea typeface="Cambria" pitchFamily="34" charset="-122"/>
                 <a:cs typeface="Cambria" pitchFamily="34" charset="-120"/>
               </a:rPr>
-              <a:t>181/181</a:t>
+              <a:t>238/238</a:t>
             </a:r>
             <a:endParaRPr lang="en-US" sz="3000" dirty="0"/>
           </a:p>
